--- a/classes/parte-8-blue-team-deteccion-y-soc/195-threat-intelligence-operacional/clase-195-presentacion.pptx
+++ b/classes/parte-8-blue-team-deteccion-y-soc/195-threat-intelligence-operacional/clase-195-presentacion.pptx
@@ -22,6 +22,7 @@
     <p:sldId id="270" r:id="rId21"/>
     <p:sldId id="271" r:id="rId22"/>
     <p:sldId id="272" r:id="rId23"/>
+    <p:sldId id="273" r:id="rId24"/>
   </p:sldIdLst>
   <p:sldSz cx="9144000" cy="6858000" type="screen4x3"/>
   <p:notesSz cx="6858000" cy="9144000"/>
@@ -4195,6 +4196,36 @@
                   <a:srgbClr val="22282E"/>
                 </a:solidFill>
               </a:rPr>
+              <a:t>•  MITRE ATT&amp;CK: T1498 y sus subtécnicas modelan Network Denial of Service — &lt;https://attack.mitre.org/techniques/T1498/&gt;</a:t>
+            </a:r>
+          </a:p>
+          <a:p>
+            <a:pPr>
+              <a:spcAft>
+                <a:spcPts val="600"/>
+              </a:spcAft>
+            </a:pPr>
+            <a:r>
+              <a:rPr sz="1500">
+                <a:solidFill>
+                  <a:srgbClr val="22282E"/>
+                </a:solidFill>
+              </a:rPr>
+              <a:t>•  DOJ: acción coordinada contra servicios DDoS-for-hire de mayo de 2025 — &lt;https://www.justice.gov/usao-cdca/pr/law-enforcement-seizes-9-ddos-hire-webpages-part-global-crackdown-booter-and-stresser&gt;</a:t>
+            </a:r>
+          </a:p>
+          <a:p>
+            <a:pPr>
+              <a:spcAft>
+                <a:spcPts val="600"/>
+              </a:spcAft>
+            </a:pPr>
+            <a:r>
+              <a:rPr sz="1500">
+                <a:solidFill>
+                  <a:srgbClr val="22282E"/>
+                </a:solidFill>
+              </a:rPr>
               <a:t>•  Murdoch, D. Blue Team Handbook: SOC, SIEM, and Threat Hunting Use Cases: bibliografía profesional complementaria para operacionalización.</a:t>
             </a:r>
           </a:p>
@@ -4246,7 +4277,7 @@
                   <a:srgbClr val="0B3D2E"/>
                 </a:solidFill>
               </a:rPr>
-              <a:t>Diagrama de la clase</a:t>
+              <a:t>Diagrama 1</a:t>
             </a:r>
           </a:p>
         </p:txBody>
@@ -4283,6 +4314,81 @@
 </p:sld>
 </file>
 
+<file path=ppt/slides/slide18.xml><?xml version="1.0" encoding="utf-8"?>
+<p:sld xmlns:a="http://schemas.openxmlformats.org/drawingml/2006/main" xmlns:p="http://schemas.openxmlformats.org/presentationml/2006/main" xmlns:r="http://schemas.openxmlformats.org/officeDocument/2006/relationships">
+  <p:cSld>
+    <p:spTree>
+      <p:nvGrpSpPr>
+        <p:cNvPr id="1" name=""/>
+        <p:cNvGrpSpPr/>
+        <p:nvPr/>
+      </p:nvGrpSpPr>
+      <p:grpSpPr/>
+      <p:sp>
+        <p:nvSpPr>
+          <p:cNvPr id="2" name="TextBox 1"/>
+          <p:cNvSpPr txBox="1"/>
+          <p:nvPr/>
+        </p:nvSpPr>
+        <p:spPr>
+          <a:xfrm>
+            <a:off x="457200" y="274320"/>
+            <a:ext cx="8229600" cy="640080"/>
+          </a:xfrm>
+          <a:prstGeom prst="rect">
+            <a:avLst/>
+          </a:prstGeom>
+          <a:noFill/>
+        </p:spPr>
+        <p:txBody>
+          <a:bodyPr wrap="square">
+            <a:spAutoFit/>
+          </a:bodyPr>
+          <a:lstStyle/>
+          <a:p>
+            <a:r>
+              <a:rPr sz="2200" b="1">
+                <a:solidFill>
+                  <a:srgbClr val="0B3D2E"/>
+                </a:solidFill>
+              </a:rPr>
+              <a:t>Diagrama 2</a:t>
+            </a:r>
+          </a:p>
+        </p:txBody>
+      </p:sp>
+      <p:pic>
+        <p:nvPicPr>
+          <p:cNvPr id="3" name="Picture 2" descr="c90f555152fa0b3b.png"/>
+          <p:cNvPicPr>
+            <a:picLocks noChangeAspect="1"/>
+          </p:cNvPicPr>
+          <p:nvPr/>
+        </p:nvPicPr>
+        <p:blipFill>
+          <a:blip r:embed="rId2"/>
+          <a:stretch>
+            <a:fillRect/>
+          </a:stretch>
+        </p:blipFill>
+        <p:spPr>
+          <a:xfrm>
+            <a:off x="457200" y="3506724"/>
+            <a:ext cx="8229600" cy="484632"/>
+          </a:xfrm>
+          <a:prstGeom prst="rect">
+            <a:avLst/>
+          </a:prstGeom>
+        </p:spPr>
+      </p:pic>
+    </p:spTree>
+  </p:cSld>
+  <p:clrMapOvr>
+    <a:masterClrMapping/>
+  </p:clrMapOvr>
+</p:sld>
+</file>
+
 <file path=ppt/slides/slide2.xml><?xml version="1.0" encoding="utf-8"?>
 <p:sld xmlns:a="http://schemas.openxmlformats.org/drawingml/2006/main" xmlns:p="http://schemas.openxmlformats.org/presentationml/2006/main" xmlns:r="http://schemas.openxmlformats.org/officeDocument/2006/relationships">
   <p:cSld>
@@ -4821,67 +4927,67 @@
                   <a:srgbClr val="22282E"/>
                 </a:solidFill>
               </a:rPr>
-              <a:t>•  «Recibir más indicadores» no define éxito. Un requerimiento podría ser: «¿qué infraestructura y procedimientos de campañas contra nuestro sector podemos convertir esta semana en controles para correo…</a:t>
-            </a:r>
-          </a:p>
-          <a:p>
-            <a:pPr>
-              <a:spcAft>
-                <a:spcPts val="600"/>
-              </a:spcAft>
-            </a:pPr>
-            <a:r>
-              <a:rPr sz="1500">
-                <a:solidFill>
-                  <a:srgbClr val="22282E"/>
-                </a:solidFill>
-              </a:rPr>
-              <a:t>•  Estratégica, operacional y táctica describen alcance y audiencia, no jerarquía de calidad. Dirección puede necesitar tendencia e impacto; respuesta, secuencia de campaña; detección, observables y…</a:t>
-            </a:r>
-          </a:p>
-          <a:p>
-            <a:pPr>
-              <a:spcAft>
-                <a:spcPts val="600"/>
-              </a:spcAft>
-            </a:pPr>
-            <a:r>
-              <a:rPr sz="1500">
-                <a:solidFill>
-                  <a:srgbClr val="22282E"/>
-                </a:solidFill>
-              </a:rPr>
-              <a:t>•  Una IP encontrada en un reporte es un observable. Se vuelve indicador cuando se añade relación, periodo, fuente y confianza: «servidor C2 observado por esta campaña entre estas fechas». La dirección…</a:t>
-            </a:r>
-          </a:p>
-          <a:p>
-            <a:pPr>
-              <a:spcAft>
-                <a:spcPts val="600"/>
-              </a:spcAft>
-            </a:pPr>
-            <a:r>
-              <a:rPr sz="1500">
-                <a:solidFill>
-                  <a:srgbClr val="22282E"/>
-                </a:solidFill>
-              </a:rPr>
-              <a:t>•  La confianza separa credibilidad de fuente y fuerza de la asociación. Dos fuentes pueden repetir el mismo origen y no ser independientes. Se preserva procedencia y se evita incrementar confianza solo…</a:t>
-            </a:r>
-          </a:p>
-          <a:p>
-            <a:pPr>
-              <a:spcAft>
-                <a:spcPts val="600"/>
-              </a:spcAft>
-            </a:pPr>
-            <a:r>
-              <a:rPr sz="1500">
-                <a:solidFill>
-                  <a:srgbClr val="22282E"/>
-                </a:solidFill>
-              </a:rPr>
-              <a:t>•  STIX representa objetos como indicator, malware, campaign o attack-pattern y sus relaciones; TAXII define servicios para intercambiarlos. Implementar ambos no garantiza calidad: objetos sin fechas…</a:t>
+              <a:t>•  Un servicio DDoS-for-hire obliga a separar actor, capacidad, infraestructura, servicio, cliente,</a:t>
+            </a:r>
+          </a:p>
+          <a:p>
+            <a:pPr>
+              <a:spcAft>
+                <a:spcPts val="600"/>
+              </a:spcAft>
+            </a:pPr>
+            <a:r>
+              <a:rPr sz="1500">
+                <a:solidFill>
+                  <a:srgbClr val="22282E"/>
+                </a:solidFill>
+              </a:rPr>
+              <a:t>•  campaña, objetivo, observable, indicador y TTP. Una IP puede ser infraestructura compartida; un</a:t>
+            </a:r>
+          </a:p>
+          <a:p>
+            <a:pPr>
+              <a:spcAft>
+                <a:spcPts val="600"/>
+              </a:spcAft>
+            </a:pPr>
+            <a:r>
+              <a:rPr sz="1500">
+                <a:solidFill>
+                  <a:srgbClr val="22282E"/>
+                </a:solidFill>
+              </a:rPr>
+              <a:t>•  certificado puede reutilizarse; un ASN aloja también actividad legítima. STIX expresa relaciones y</a:t>
+            </a:r>
+          </a:p>
+          <a:p>
+            <a:pPr>
+              <a:spcAft>
+                <a:spcPts val="600"/>
+              </a:spcAft>
+            </a:pPr>
+            <a:r>
+              <a:rPr sz="1500">
+                <a:solidFill>
+                  <a:srgbClr val="22282E"/>
+                </a:solidFill>
+              </a:rPr>
+              <a:t>•  MISP/OpenCTI conserva procedencia, confianza y vigencia. El Diamond Model ayuda a contrastar</a:t>
+            </a:r>
+          </a:p>
+          <a:p>
+            <a:pPr>
+              <a:spcAft>
+                <a:spcPts val="600"/>
+              </a:spcAft>
+            </a:pPr>
+            <a:r>
+              <a:rPr sz="1500">
+                <a:solidFill>
+                  <a:srgbClr val="22282E"/>
+                </a:solidFill>
+              </a:rPr>
+              <a:t>•  adversario, capacidad, infraestructura y víctima, pero no convierte una relación técnica en atribución.</a:t>
             </a:r>
           </a:p>
         </p:txBody>
